--- a/Misty tutorial.pptx
+++ b/Misty tutorial.pptx
@@ -5,7 +5,7 @@
     <p:sldMasterId id="2147483660" r:id="rId1"/>
   </p:sldMasterIdLst>
   <p:notesMasterIdLst>
-    <p:notesMasterId r:id="rId16"/>
+    <p:notesMasterId r:id="rId17"/>
   </p:notesMasterIdLst>
   <p:sldIdLst>
     <p:sldId id="618" r:id="rId2"/>
@@ -21,7 +21,8 @@
     <p:sldId id="616" r:id="rId12"/>
     <p:sldId id="617" r:id="rId13"/>
     <p:sldId id="613" r:id="rId14"/>
-    <p:sldId id="612" r:id="rId15"/>
+    <p:sldId id="619" r:id="rId15"/>
+    <p:sldId id="612" r:id="rId16"/>
   </p:sldIdLst>
   <p:sldSz cx="12192000" cy="6858000"/>
   <p:notesSz cx="6858000" cy="9144000"/>
@@ -210,7 +211,7 @@
           <a:p>
             <a:fld id="{6A3D842E-6122-B848-B7FF-88633C775B81}" type="datetimeFigureOut">
               <a:rPr lang="en-NL" smtClean="0"/>
-              <a:t>14/02/2025</a:t>
+              <a:t>17/09/2026</a:t>
             </a:fld>
             <a:endParaRPr lang="en-NL"/>
           </a:p>
@@ -1654,7 +1655,7 @@
           <a:p>
             <a:fld id="{5284E793-42BC-7A47-9251-8F00007A7FA8}" type="datetimeFigureOut">
               <a:rPr lang="nl-NL" smtClean="0"/>
-              <a:t>14-02-2025</a:t>
+              <a:t>17-09-2026</a:t>
             </a:fld>
             <a:endParaRPr lang="nl-NL"/>
           </a:p>
@@ -6450,195 +6451,182 @@
           <a:bodyPr/>
           <a:lstStyle/>
           <a:p>
+            <a:r>
+              <a:rPr lang="en-US" dirty="0"/>
+              <a:t>To access the misty robot from python you need to install Misty-SDK for Python version 3.8 or higher. It is best to create a separate virtual environment (see e.g. </a:t>
+            </a:r>
+            <a:r>
+              <a:rPr lang="en-US" u="sng" dirty="0">
+                <a:hlinkClick r:id="rId2"/>
+              </a:rPr>
+              <a:t>https://packaging.python.org/en/latest/guides/installing-using-pip-and-virtual-environments/</a:t>
+            </a:r>
+            <a:r>
+              <a:rPr lang="en-US" dirty="0"/>
+              <a:t> ).</a:t>
+            </a:r>
+            <a:endParaRPr lang="en-NL" dirty="0"/>
+          </a:p>
+          <a:p>
+            <a:r>
+              <a:rPr lang="en-US" dirty="0"/>
+              <a:t>Open the command shell for your Python 3 distribution and install </a:t>
+            </a:r>
+            <a:r>
+              <a:rPr lang="en-US" dirty="0" err="1"/>
+              <a:t>mistyPy</a:t>
+            </a:r>
+            <a:r>
+              <a:rPr lang="en-US" dirty="0"/>
+              <a:t>:</a:t>
+            </a:r>
+            <a:endParaRPr lang="en-NL" dirty="0"/>
+          </a:p>
+          <a:p>
+            <a:endParaRPr lang="en-US" sz="2000" dirty="0">
+              <a:latin typeface="Courier New" panose="02070309020205020404" pitchFamily="49" charset="0"/>
+              <a:cs typeface="Courier New" panose="02070309020205020404" pitchFamily="49" charset="0"/>
+            </a:endParaRPr>
+          </a:p>
+          <a:p>
+            <a:r>
+              <a:rPr lang="en-US" sz="2000" dirty="0">
+                <a:latin typeface="Courier New" panose="02070309020205020404" pitchFamily="49" charset="0"/>
+                <a:cs typeface="Courier New" panose="02070309020205020404" pitchFamily="49" charset="0"/>
+              </a:rPr>
+              <a:t>	pip install </a:t>
+            </a:r>
+            <a:r>
+              <a:rPr lang="en-US" sz="2000" dirty="0" err="1">
+                <a:latin typeface="Courier New" panose="02070309020205020404" pitchFamily="49" charset="0"/>
+                <a:cs typeface="Courier New" panose="02070309020205020404" pitchFamily="49" charset="0"/>
+              </a:rPr>
+              <a:t>git+https</a:t>
+            </a:r>
+            <a:r>
+              <a:rPr lang="en-US" sz="2000" dirty="0">
+                <a:latin typeface="Courier New" panose="02070309020205020404" pitchFamily="49" charset="0"/>
+                <a:cs typeface="Courier New" panose="02070309020205020404" pitchFamily="49" charset="0"/>
+              </a:rPr>
+              <a:t>://</a:t>
+            </a:r>
+            <a:r>
+              <a:rPr lang="en-US" sz="2000" dirty="0" err="1">
+                <a:latin typeface="Courier New" panose="02070309020205020404" pitchFamily="49" charset="0"/>
+                <a:cs typeface="Courier New" panose="02070309020205020404" pitchFamily="49" charset="0"/>
+              </a:rPr>
+              <a:t>github.com</a:t>
+            </a:r>
+            <a:r>
+              <a:rPr lang="en-US" sz="2000" dirty="0">
+                <a:latin typeface="Courier New" panose="02070309020205020404" pitchFamily="49" charset="0"/>
+                <a:cs typeface="Courier New" panose="02070309020205020404" pitchFamily="49" charset="0"/>
+              </a:rPr>
+              <a:t>/</a:t>
+            </a:r>
+            <a:r>
+              <a:rPr lang="en-US" sz="2000" dirty="0" err="1">
+                <a:latin typeface="Courier New" panose="02070309020205020404" pitchFamily="49" charset="0"/>
+                <a:cs typeface="Courier New" panose="02070309020205020404" pitchFamily="49" charset="0"/>
+              </a:rPr>
+              <a:t>MistyCommunity</a:t>
+            </a:r>
+            <a:r>
+              <a:rPr lang="en-US" sz="2000" dirty="0">
+                <a:latin typeface="Courier New" panose="02070309020205020404" pitchFamily="49" charset="0"/>
+                <a:cs typeface="Courier New" panose="02070309020205020404" pitchFamily="49" charset="0"/>
+              </a:rPr>
+              <a:t>/Python-</a:t>
+            </a:r>
+            <a:r>
+              <a:rPr lang="en-US" sz="2000" dirty="0" err="1">
+                <a:latin typeface="Courier New" panose="02070309020205020404" pitchFamily="49" charset="0"/>
+                <a:cs typeface="Courier New" panose="02070309020205020404" pitchFamily="49" charset="0"/>
+              </a:rPr>
+              <a:t>SDK.git</a:t>
+            </a:r>
+            <a:endParaRPr lang="en-US" dirty="0"/>
+          </a:p>
+          <a:p>
             <a:pPr marL="342900" indent="-342900">
               <a:buFont typeface="Arial" panose="020B0604020202020204" pitchFamily="34" charset="0"/>
               <a:buChar char="•"/>
             </a:pPr>
-            <a:r>
-              <a:rPr lang="en-GB" dirty="0"/>
-              <a:t>The WEB API can also be accessed from Python.</a:t>
-            </a:r>
-          </a:p>
-          <a:p>
-            <a:pPr marL="342900" indent="-342900">
-              <a:buFont typeface="Arial" panose="020B0604020202020204" pitchFamily="34" charset="0"/>
-              <a:buChar char="•"/>
-            </a:pPr>
-            <a:r>
-              <a:rPr lang="en-GB" dirty="0"/>
-              <a:t>Using Python 3.8 or higher do:</a:t>
-            </a:r>
-          </a:p>
-          <a:p>
-            <a:r>
-              <a:rPr lang="en-GB" dirty="0">
+            <a:endParaRPr lang="en-US" dirty="0">
+              <a:solidFill>
+                <a:srgbClr val="FF0000"/>
+              </a:solidFill>
+            </a:endParaRPr>
+          </a:p>
+          <a:p>
+            <a:r>
+              <a:rPr lang="en-US" dirty="0">
+                <a:solidFill>
+                  <a:srgbClr val="FF0000"/>
+                </a:solidFill>
+              </a:rPr>
+              <a:t>Do not use “</a:t>
+            </a:r>
+            <a:r>
+              <a:rPr lang="en-US" dirty="0">
+                <a:solidFill>
+                  <a:srgbClr val="FF0000"/>
+                </a:solidFill>
                 <a:latin typeface="Courier New" panose="02070309020205020404" pitchFamily="49" charset="0"/>
                 <a:cs typeface="Courier New" panose="02070309020205020404" pitchFamily="49" charset="0"/>
               </a:rPr>
-              <a:t>	pip install Misty-SDK</a:t>
-            </a:r>
-          </a:p>
-          <a:p>
-            <a:pPr marL="342900" indent="-342900">
-              <a:buFont typeface="Arial" panose="020B0604020202020204" pitchFamily="34" charset="0"/>
-              <a:buChar char="•"/>
-            </a:pPr>
-            <a:r>
-              <a:rPr lang="en-GB" dirty="0"/>
-              <a:t>It will also install</a:t>
-            </a:r>
-          </a:p>
-          <a:p>
-            <a:pPr marL="269994" lvl="3" indent="0">
-              <a:buNone/>
-            </a:pPr>
-            <a:r>
-              <a:rPr lang="en-GB" sz="1400" b="0" i="0" u="none" strike="noStrike" dirty="0">
+              <a:t>pip install </a:t>
+            </a:r>
+            <a:r>
+              <a:rPr lang="en-US" dirty="0" err="1">
                 <a:solidFill>
-                  <a:srgbClr val="464646"/>
+                  <a:srgbClr val="FF0000"/>
                 </a:solidFill>
-                <a:effectLst/>
                 <a:latin typeface="Courier New" panose="02070309020205020404" pitchFamily="49" charset="0"/>
                 <a:cs typeface="Courier New" panose="02070309020205020404" pitchFamily="49" charset="0"/>
               </a:rPr>
-              <a:t>requests&gt;=2.25.1</a:t>
-            </a:r>
-            <a:br>
-              <a:rPr lang="en-GB" sz="1400" b="0" i="0" u="none" strike="noStrike" dirty="0">
+              <a:t>mistyPy</a:t>
+            </a:r>
+            <a:r>
+              <a:rPr lang="en-US" dirty="0">
                 <a:solidFill>
-                  <a:srgbClr val="464646"/>
+                  <a:srgbClr val="FF0000"/>
                 </a:solidFill>
-                <a:effectLst/>
-                <a:latin typeface="Courier New" panose="02070309020205020404" pitchFamily="49" charset="0"/>
-                <a:cs typeface="Courier New" panose="02070309020205020404" pitchFamily="49" charset="0"/>
               </a:rPr>
-            </a:br>
-            <a:r>
-              <a:rPr lang="en-GB" sz="1400" b="0" i="0" u="none" strike="noStrike" dirty="0" err="1">
+              <a:t>”, as it is outdated (</a:t>
+            </a:r>
+            <a:r>
+              <a:rPr lang="en-US" sz="1800" dirty="0">
                 <a:solidFill>
-                  <a:srgbClr val="464646"/>
+                  <a:srgbClr val="FF0000"/>
                 </a:solidFill>
-                <a:effectLst/>
-                <a:latin typeface="Courier New" panose="02070309020205020404" pitchFamily="49" charset="0"/>
-                <a:cs typeface="Courier New" panose="02070309020205020404" pitchFamily="49" charset="0"/>
               </a:rPr>
-              <a:t>websocket</a:t>
-            </a:r>
-            <a:r>
-              <a:rPr lang="en-GB" sz="1400" b="0" i="0" u="none" strike="noStrike" dirty="0">
+              <a:t>naming convention changed</a:t>
+            </a:r>
+            <a:r>
+              <a:rPr lang="en-US" dirty="0">
                 <a:solidFill>
-                  <a:srgbClr val="464646"/>
+                  <a:srgbClr val="FF0000"/>
                 </a:solidFill>
-                <a:effectLst/>
-                <a:latin typeface="Courier New" panose="02070309020205020404" pitchFamily="49" charset="0"/>
-                <a:cs typeface="Courier New" panose="02070309020205020404" pitchFamily="49" charset="0"/>
               </a:rPr>
-              <a:t>-client&lt;=0.57.0</a:t>
-            </a:r>
-            <a:br>
-              <a:rPr lang="en-GB" sz="1400" b="0" i="0" u="none" strike="noStrike" dirty="0">
-                <a:solidFill>
-                  <a:srgbClr val="464646"/>
-                </a:solidFill>
-                <a:effectLst/>
-                <a:latin typeface="Courier New" panose="02070309020205020404" pitchFamily="49" charset="0"/>
-                <a:cs typeface="Courier New" panose="02070309020205020404" pitchFamily="49" charset="0"/>
-              </a:rPr>
-            </a:br>
-            <a:r>
-              <a:rPr lang="en-GB" sz="1400" b="0" i="0" u="none" strike="noStrike" dirty="0" err="1">
-                <a:solidFill>
-                  <a:srgbClr val="464646"/>
-                </a:solidFill>
-                <a:effectLst/>
-                <a:latin typeface="Courier New" panose="02070309020205020404" pitchFamily="49" charset="0"/>
-                <a:cs typeface="Courier New" panose="02070309020205020404" pitchFamily="49" charset="0"/>
-              </a:rPr>
-              <a:t>yapf</a:t>
-            </a:r>
-            <a:r>
-              <a:rPr lang="en-GB" sz="1400" b="0" i="0" u="none" strike="noStrike" dirty="0">
-                <a:solidFill>
-                  <a:srgbClr val="464646"/>
-                </a:solidFill>
-                <a:effectLst/>
-                <a:latin typeface="Courier New" panose="02070309020205020404" pitchFamily="49" charset="0"/>
-                <a:cs typeface="Courier New" panose="02070309020205020404" pitchFamily="49" charset="0"/>
-              </a:rPr>
-              <a:t>&gt;=0.30.0</a:t>
-            </a:r>
-            <a:endParaRPr lang="en-GB" dirty="0"/>
-          </a:p>
-          <a:p>
-            <a:pPr marL="342900" indent="-342900">
-              <a:buFont typeface="Arial" panose="020B0604020202020204" pitchFamily="34" charset="0"/>
-              <a:buChar char="•"/>
-            </a:pPr>
-            <a:r>
-              <a:rPr lang="en-GB" dirty="0"/>
-              <a:t>See </a:t>
-            </a:r>
-            <a:r>
-              <a:rPr lang="en-GB" dirty="0">
-                <a:hlinkClick r:id="rId2"/>
+              <a:t>)</a:t>
+            </a:r>
+            <a:endParaRPr lang="en-US" dirty="0"/>
+          </a:p>
+          <a:p>
+            <a:r>
+              <a:rPr lang="en-US" dirty="0"/>
+              <a:t>Details on how to use this package can be found here: </a:t>
+            </a:r>
+            <a:r>
+              <a:rPr lang="en-US" u="sng" dirty="0">
+                <a:hlinkClick r:id="rId3"/>
               </a:rPr>
               <a:t>https://github.com/MistyCommunity/Python-SDK</a:t>
             </a:r>
             <a:r>
-              <a:rPr lang="en-GB" dirty="0"/>
-              <a:t> for details and examples.</a:t>
-            </a:r>
-          </a:p>
-          <a:p>
-            <a:pPr marL="342900" indent="-342900">
-              <a:buFont typeface="Arial" panose="020B0604020202020204" pitchFamily="34" charset="0"/>
-              <a:buChar char="•"/>
-            </a:pPr>
-            <a:r>
-              <a:rPr lang="en-GB" dirty="0"/>
-              <a:t>Great if you want to use OpenCV or </a:t>
-            </a:r>
-            <a:r>
-              <a:rPr lang="en-GB" dirty="0" err="1"/>
-              <a:t>Mediapipe</a:t>
-            </a:r>
-            <a:r>
-              <a:rPr lang="en-GB" dirty="0"/>
-              <a:t> for advanced image processing</a:t>
-            </a:r>
-          </a:p>
-          <a:p>
-            <a:pPr marL="612893" lvl="2" indent="-342900"/>
-            <a:r>
-              <a:rPr lang="en-GB" dirty="0"/>
-              <a:t>Python 3.10 recommended</a:t>
-            </a:r>
-          </a:p>
-          <a:p>
-            <a:pPr marL="612893" lvl="2" indent="-342900"/>
-            <a:r>
-              <a:rPr lang="en-GB" dirty="0"/>
-              <a:t>https://</a:t>
-            </a:r>
-            <a:r>
-              <a:rPr lang="en-GB" dirty="0" err="1"/>
-              <a:t>ai.google.dev</a:t>
-            </a:r>
-            <a:r>
-              <a:rPr lang="en-GB" dirty="0"/>
-              <a:t>/edge/</a:t>
-            </a:r>
-            <a:r>
-              <a:rPr lang="en-GB" dirty="0" err="1"/>
-              <a:t>mediapipe</a:t>
-            </a:r>
-            <a:r>
-              <a:rPr lang="en-GB" dirty="0"/>
-              <a:t>/solutions/</a:t>
-            </a:r>
-            <a:r>
-              <a:rPr lang="en-GB" dirty="0" err="1"/>
-              <a:t>setup_python</a:t>
+              <a:rPr lang="en-US" dirty="0"/>
+              <a:t> </a:t>
             </a:r>
             <a:endParaRPr lang="en-NL" dirty="0"/>
           </a:p>
@@ -6732,6 +6720,287 @@
   <p:cSld>
     <p:spTree>
       <p:nvGrpSpPr>
+        <p:cNvPr id="1" name="">
+          <a:extLst>
+            <a:ext uri="{FF2B5EF4-FFF2-40B4-BE49-F238E27FC236}">
+              <a16:creationId xmlns:a16="http://schemas.microsoft.com/office/drawing/2014/main" id="{07730333-0096-6ECD-00EA-CB705A4B503D}"/>
+            </a:ext>
+          </a:extLst>
+        </p:cNvPr>
+        <p:cNvGrpSpPr/>
+        <p:nvPr/>
+      </p:nvGrpSpPr>
+      <p:grpSpPr>
+        <a:xfrm>
+          <a:off x="0" y="0"/>
+          <a:ext cx="0" cy="0"/>
+          <a:chOff x="0" y="0"/>
+          <a:chExt cx="0" cy="0"/>
+        </a:xfrm>
+      </p:grpSpPr>
+      <p:sp>
+        <p:nvSpPr>
+          <p:cNvPr id="2" name="Title 1">
+            <a:extLst>
+              <a:ext uri="{FF2B5EF4-FFF2-40B4-BE49-F238E27FC236}">
+                <a16:creationId xmlns:a16="http://schemas.microsoft.com/office/drawing/2014/main" id="{C4AFBE06-E783-3728-BE0C-CAE16C46CE3F}"/>
+              </a:ext>
+            </a:extLst>
+          </p:cNvPr>
+          <p:cNvSpPr>
+            <a:spLocks noGrp="1"/>
+          </p:cNvSpPr>
+          <p:nvPr>
+            <p:ph type="title"/>
+          </p:nvPr>
+        </p:nvSpPr>
+        <p:spPr/>
+        <p:txBody>
+          <a:bodyPr/>
+          <a:lstStyle/>
+          <a:p>
+            <a:r>
+              <a:rPr lang="en-NL" dirty="0"/>
+              <a:t>Python API</a:t>
+            </a:r>
+          </a:p>
+        </p:txBody>
+      </p:sp>
+      <p:sp>
+        <p:nvSpPr>
+          <p:cNvPr id="3" name="Content Placeholder 2">
+            <a:extLst>
+              <a:ext uri="{FF2B5EF4-FFF2-40B4-BE49-F238E27FC236}">
+                <a16:creationId xmlns:a16="http://schemas.microsoft.com/office/drawing/2014/main" id="{E2B26A39-5FD8-D268-2458-DE0E688082EC}"/>
+              </a:ext>
+            </a:extLst>
+          </p:cNvPr>
+          <p:cNvSpPr>
+            <a:spLocks noGrp="1"/>
+          </p:cNvSpPr>
+          <p:nvPr>
+            <p:ph idx="1"/>
+          </p:nvPr>
+        </p:nvSpPr>
+        <p:spPr/>
+        <p:txBody>
+          <a:bodyPr/>
+          <a:lstStyle/>
+          <a:p>
+            <a:r>
+              <a:rPr lang="en-US" dirty="0"/>
+              <a:t>As for the nao robot you should install other useful libraries as needed:</a:t>
+            </a:r>
+            <a:endParaRPr lang="en-NL" dirty="0"/>
+          </a:p>
+          <a:p>
+            <a:r>
+              <a:rPr lang="en-US" dirty="0"/>
+              <a:t>pip install </a:t>
+            </a:r>
+            <a:r>
+              <a:rPr lang="en-US" dirty="0" err="1"/>
+              <a:t>numpy</a:t>
+            </a:r>
+            <a:r>
+              <a:rPr lang="en-US" dirty="0"/>
+              <a:t> </a:t>
+            </a:r>
+            <a:r>
+              <a:rPr lang="en-US" dirty="0" err="1"/>
+              <a:t>scipy</a:t>
+            </a:r>
+            <a:r>
+              <a:rPr lang="en-US" dirty="0"/>
+              <a:t> matplotlib</a:t>
+            </a:r>
+            <a:endParaRPr lang="en-NL" dirty="0"/>
+          </a:p>
+          <a:p>
+            <a:r>
+              <a:rPr lang="en-US" dirty="0"/>
+              <a:t>pip install </a:t>
+            </a:r>
+            <a:r>
+              <a:rPr lang="en-US" dirty="0" err="1"/>
+              <a:t>opencv</a:t>
+            </a:r>
+            <a:r>
+              <a:rPr lang="en-US" dirty="0"/>
+              <a:t>-python</a:t>
+            </a:r>
+            <a:endParaRPr lang="en-NL" dirty="0"/>
+          </a:p>
+          <a:p>
+            <a:pPr marL="342900" indent="-342900">
+              <a:buFont typeface="Arial" panose="020B0604020202020204" pitchFamily="34" charset="0"/>
+              <a:buChar char="•"/>
+            </a:pPr>
+            <a:endParaRPr lang="en-GB" dirty="0"/>
+          </a:p>
+          <a:p>
+            <a:pPr marL="342900" indent="-342900">
+              <a:buFont typeface="Arial" panose="020B0604020202020204" pitchFamily="34" charset="0"/>
+              <a:buChar char="•"/>
+            </a:pPr>
+            <a:r>
+              <a:rPr lang="en-GB" dirty="0"/>
+              <a:t>See </a:t>
+            </a:r>
+            <a:r>
+              <a:rPr lang="en-GB" dirty="0">
+                <a:hlinkClick r:id="rId2"/>
+              </a:rPr>
+              <a:t>https://github.com/MistyCommunity/Python-SDK</a:t>
+            </a:r>
+            <a:r>
+              <a:rPr lang="en-GB" dirty="0"/>
+              <a:t> for details and examples.</a:t>
+            </a:r>
+          </a:p>
+          <a:p>
+            <a:pPr marL="342900" indent="-342900">
+              <a:buFont typeface="Arial" panose="020B0604020202020204" pitchFamily="34" charset="0"/>
+              <a:buChar char="•"/>
+            </a:pPr>
+            <a:r>
+              <a:rPr lang="en-GB" dirty="0"/>
+              <a:t>Great if you want to use OpenCV or </a:t>
+            </a:r>
+            <a:r>
+              <a:rPr lang="en-GB" dirty="0" err="1"/>
+              <a:t>Mediapipe</a:t>
+            </a:r>
+            <a:r>
+              <a:rPr lang="en-GB" dirty="0"/>
+              <a:t> for advanced image processing</a:t>
+            </a:r>
+          </a:p>
+          <a:p>
+            <a:pPr marL="612893" lvl="2" indent="-342900"/>
+            <a:r>
+              <a:rPr lang="en-GB" dirty="0"/>
+              <a:t>Python 3.10 recommended</a:t>
+            </a:r>
+          </a:p>
+          <a:p>
+            <a:pPr marL="612893" lvl="2" indent="-342900"/>
+            <a:r>
+              <a:rPr lang="en-GB" dirty="0"/>
+              <a:t>https://</a:t>
+            </a:r>
+            <a:r>
+              <a:rPr lang="en-GB" dirty="0" err="1"/>
+              <a:t>ai.google.dev</a:t>
+            </a:r>
+            <a:r>
+              <a:rPr lang="en-GB" dirty="0"/>
+              <a:t>/edge/</a:t>
+            </a:r>
+            <a:r>
+              <a:rPr lang="en-GB" dirty="0" err="1"/>
+              <a:t>mediapipe</a:t>
+            </a:r>
+            <a:r>
+              <a:rPr lang="en-GB" dirty="0"/>
+              <a:t>/solutions/</a:t>
+            </a:r>
+            <a:r>
+              <a:rPr lang="en-GB" dirty="0" err="1"/>
+              <a:t>setup_python</a:t>
+            </a:r>
+            <a:endParaRPr lang="en-NL" dirty="0"/>
+          </a:p>
+        </p:txBody>
+      </p:sp>
+      <p:sp>
+        <p:nvSpPr>
+          <p:cNvPr id="4" name="Footer Placeholder 3">
+            <a:extLst>
+              <a:ext uri="{FF2B5EF4-FFF2-40B4-BE49-F238E27FC236}">
+                <a16:creationId xmlns:a16="http://schemas.microsoft.com/office/drawing/2014/main" id="{9D50DADF-CBB7-22B2-4445-61E4BA11F566}"/>
+              </a:ext>
+            </a:extLst>
+          </p:cNvPr>
+          <p:cNvSpPr>
+            <a:spLocks noGrp="1"/>
+          </p:cNvSpPr>
+          <p:nvPr>
+            <p:ph type="ftr" sz="quarter" idx="11"/>
+          </p:nvPr>
+        </p:nvSpPr>
+        <p:spPr/>
+        <p:txBody>
+          <a:bodyPr/>
+          <a:lstStyle/>
+          <a:p>
+            <a:r>
+              <a:rPr lang="en-US"/>
+              <a:t>Title of Presentation – by Insert Header and Footer text</a:t>
+            </a:r>
+            <a:endParaRPr lang="en-US" dirty="0"/>
+          </a:p>
+        </p:txBody>
+      </p:sp>
+      <p:sp>
+        <p:nvSpPr>
+          <p:cNvPr id="5" name="Slide Number Placeholder 4">
+            <a:extLst>
+              <a:ext uri="{FF2B5EF4-FFF2-40B4-BE49-F238E27FC236}">
+                <a16:creationId xmlns:a16="http://schemas.microsoft.com/office/drawing/2014/main" id="{686F2C75-A716-BA25-5AE9-51C0230B8FF2}"/>
+              </a:ext>
+            </a:extLst>
+          </p:cNvPr>
+          <p:cNvSpPr>
+            <a:spLocks noGrp="1"/>
+          </p:cNvSpPr>
+          <p:nvPr>
+            <p:ph type="sldNum" sz="quarter" idx="12"/>
+          </p:nvPr>
+        </p:nvSpPr>
+        <p:spPr/>
+        <p:txBody>
+          <a:bodyPr/>
+          <a:lstStyle/>
+          <a:p>
+            <a:fld id="{B7CEC10D-CD46-426F-915E-6C78530279CB}" type="slidenum">
+              <a:rPr lang="en-US" smtClean="0"/>
+              <a:t>14</a:t>
+            </a:fld>
+            <a:endParaRPr lang="en-US" dirty="0"/>
+          </a:p>
+        </p:txBody>
+      </p:sp>
+    </p:spTree>
+    <p:extLst>
+      <p:ext uri="{BB962C8B-B14F-4D97-AF65-F5344CB8AC3E}">
+        <p14:creationId xmlns:p14="http://schemas.microsoft.com/office/powerpoint/2010/main" val="2658085244"/>
+      </p:ext>
+    </p:extLst>
+  </p:cSld>
+  <p:clrMapOvr>
+    <a:masterClrMapping/>
+  </p:clrMapOvr>
+  <mc:AlternateContent xmlns:mc="http://schemas.openxmlformats.org/markup-compatibility/2006">
+    <mc:Choice xmlns:p14="http://schemas.microsoft.com/office/powerpoint/2010/main" Requires="p14">
+      <p:transition spd="med" p14:dur="700">
+        <p:fade/>
+      </p:transition>
+    </mc:Choice>
+    <mc:Fallback>
+      <p:transition spd="med">
+        <p:fade/>
+      </p:transition>
+    </mc:Fallback>
+  </mc:AlternateContent>
+</p:sld>
+</file>
+
+<file path=ppt/slides/slide15.xml><?xml version="1.0" encoding="utf-8"?>
+<p:sld xmlns:a="http://schemas.openxmlformats.org/drawingml/2006/main" xmlns:r="http://schemas.openxmlformats.org/officeDocument/2006/relationships" xmlns:p="http://schemas.openxmlformats.org/presentationml/2006/main">
+  <p:cSld>
+    <p:spTree>
+      <p:nvGrpSpPr>
         <p:cNvPr id="1" name=""/>
         <p:cNvGrpSpPr/>
         <p:nvPr/>
@@ -6956,7 +7225,7 @@
           <a:p>
             <a:fld id="{B7CEC10D-CD46-426F-915E-6C78530279CB}" type="slidenum">
               <a:rPr lang="en-US" smtClean="0"/>
-              <a:t>14</a:t>
+              <a:t>15</a:t>
             </a:fld>
             <a:endParaRPr lang="en-US" dirty="0"/>
           </a:p>

--- a/Misty tutorial.pptx
+++ b/Misty tutorial.pptx
@@ -211,7 +211,7 @@
           <a:p>
             <a:fld id="{6A3D842E-6122-B848-B7FF-88633C775B81}" type="datetimeFigureOut">
               <a:rPr lang="en-NL" smtClean="0"/>
-              <a:t>17/09/2026</a:t>
+              <a:t>01/10/2026</a:t>
             </a:fld>
             <a:endParaRPr lang="en-NL"/>
           </a:p>
@@ -1655,7 +1655,7 @@
           <a:p>
             <a:fld id="{5284E793-42BC-7A47-9251-8F00007A7FA8}" type="datetimeFigureOut">
               <a:rPr lang="nl-NL" smtClean="0"/>
-              <a:t>17-09-2026</a:t>
+              <a:t>01-10-2026</a:t>
             </a:fld>
             <a:endParaRPr lang="nl-NL"/>
           </a:p>
@@ -6981,13 +6981,13 @@
   <p:clrMapOvr>
     <a:masterClrMapping/>
   </p:clrMapOvr>
-  <mc:AlternateContent xmlns:mc="http://schemas.openxmlformats.org/markup-compatibility/2006">
-    <mc:Choice xmlns:p14="http://schemas.microsoft.com/office/powerpoint/2010/main" Requires="p14">
+  <mc:AlternateContent xmlns:mc="http://schemas.openxmlformats.org/markup-compatibility/2006" xmlns:p14="http://schemas.microsoft.com/office/powerpoint/2010/main">
+    <mc:Choice Requires="p14">
       <p:transition spd="med" p14:dur="700">
         <p:fade/>
       </p:transition>
     </mc:Choice>
-    <mc:Fallback>
+    <mc:Fallback xmlns="">
       <p:transition spd="med">
         <p:fade/>
       </p:transition>
@@ -7997,8 +7997,23 @@
           <a:p>
             <a:r>
               <a:rPr lang="en-NL" dirty="0"/>
-              <a:t>IP address is 192.168.0.100</a:t>
-            </a:r>
+              <a:t>IP address is: </a:t>
+            </a:r>
+          </a:p>
+          <a:p>
+            <a:r>
+              <a:rPr lang="en-NL" dirty="0"/>
+              <a:t>192.168.0.151 for Misty 1</a:t>
+            </a:r>
+          </a:p>
+          <a:p>
+            <a:r>
+              <a:rPr lang="en-NL" dirty="0"/>
+              <a:t>192.168.0.152 for Misty 2</a:t>
+            </a:r>
+          </a:p>
+          <a:p>
+            <a:endParaRPr lang="en-NL" dirty="0"/>
           </a:p>
         </p:txBody>
       </p:sp>
@@ -8390,6 +8405,59 @@
           </a:extLst>
         </p:spPr>
       </p:pic>
+      <p:sp>
+        <p:nvSpPr>
+          <p:cNvPr id="6" name="TextBox 5">
+            <a:extLst>
+              <a:ext uri="{FF2B5EF4-FFF2-40B4-BE49-F238E27FC236}">
+                <a16:creationId xmlns:a16="http://schemas.microsoft.com/office/drawing/2014/main" id="{16099842-6D3A-7C87-5B33-DC004B94280F}"/>
+              </a:ext>
+            </a:extLst>
+          </p:cNvPr>
+          <p:cNvSpPr txBox="1"/>
+          <p:nvPr/>
+        </p:nvSpPr>
+        <p:spPr>
+          <a:xfrm>
+            <a:off x="812801" y="1175132"/>
+            <a:ext cx="10358782" cy="369332"/>
+          </a:xfrm>
+          <a:prstGeom prst="rect">
+            <a:avLst/>
+          </a:prstGeom>
+          <a:noFill/>
+        </p:spPr>
+        <p:txBody>
+          <a:bodyPr wrap="square" rtlCol="0">
+            <a:spAutoFit/>
+          </a:bodyPr>
+          <a:lstStyle/>
+          <a:p>
+            <a:r>
+              <a:rPr lang="en-NL" dirty="0">
+                <a:solidFill>
+                  <a:srgbClr val="FF0000"/>
+                </a:solidFill>
+              </a:rPr>
+              <a:t>App is no longer available in play/app store </a:t>
+            </a:r>
+            <a:r>
+              <a:rPr lang="en-NL" dirty="0">
+                <a:solidFill>
+                  <a:srgbClr val="FF0000"/>
+                </a:solidFill>
+                <a:sym typeface="Wingdings" pitchFamily="2" charset="2"/>
+              </a:rPr>
+              <a:t>; use USB-UTP adapter to connect directly with the robot</a:t>
+            </a:r>
+            <a:endParaRPr lang="en-NL" dirty="0">
+              <a:solidFill>
+                <a:srgbClr val="FF0000"/>
+              </a:solidFill>
+            </a:endParaRPr>
+          </a:p>
+        </p:txBody>
+      </p:sp>
     </p:spTree>
     <p:extLst>
       <p:ext uri="{BB962C8B-B14F-4D97-AF65-F5344CB8AC3E}">
@@ -8876,7 +8944,15 @@
             </a:r>
             <a:r>
               <a:rPr lang="en-NL" b="1" dirty="0"/>
-              <a:t>192.168.0.100</a:t>
+              <a:t>192.168.0.151 </a:t>
+            </a:r>
+            <a:r>
+              <a:rPr lang="en-NL" dirty="0"/>
+              <a:t>or </a:t>
+            </a:r>
+            <a:r>
+              <a:rPr lang="en-NL" b="1" dirty="0"/>
+              <a:t>152</a:t>
             </a:r>
           </a:p>
           <a:p>
